--- a/sih-26097/SIH26097_Kaushal_Saathi.pptx
+++ b/sih-26097/SIH26097_Kaushal_Saathi.pptx
@@ -7434,9 +7434,6 @@
               </a:rPr>
               <a:t>Ministry of Social Justice &amp; Empowerment  ·  </a:t>
             </a:r>
-            <a:pPr indent="0" marL="0">
-              <a:buNone/>
-            </a:pPr>
             <a:r>
               <a:rPr lang="en-US" sz="1050" u="sng" dirty="0">
                 <a:solidFill>
@@ -7575,9 +7572,6 @@
               </a:rPr>
               <a:t>NCVET  ·  </a:t>
             </a:r>
-            <a:pPr indent="0" marL="0">
-              <a:buNone/>
-            </a:pPr>
             <a:r>
               <a:rPr lang="en-US" sz="1050" u="sng" dirty="0">
                 <a:solidFill>
@@ -7716,9 +7710,6 @@
               </a:rPr>
               <a:t>MeitY  ·  </a:t>
             </a:r>
-            <a:pPr indent="0" marL="0">
-              <a:buNone/>
-            </a:pPr>
             <a:r>
               <a:rPr lang="en-US" sz="1050" u="sng" dirty="0">
                 <a:solidFill>
@@ -7857,9 +7848,6 @@
               </a:rPr>
               <a:t>AI4Bharat, IIT Madras  ·  </a:t>
             </a:r>
-            <a:pPr indent="0" marL="0">
-              <a:buNone/>
-            </a:pPr>
             <a:r>
               <a:rPr lang="en-US" sz="1050" u="sng" dirty="0">
                 <a:solidFill>
@@ -7998,9 +7986,6 @@
               </a:rPr>
               <a:t>MSDE  ·  </a:t>
             </a:r>
-            <a:pPr indent="0" marL="0">
-              <a:buNone/>
-            </a:pPr>
             <a:r>
               <a:rPr lang="en-US" sz="1050" u="sng" dirty="0">
                 <a:solidFill>
@@ -8139,9 +8124,6 @@
               </a:rPr>
               <a:t>Government of India  ·  </a:t>
             </a:r>
-            <a:pPr indent="0" marL="0">
-              <a:buNone/>
-            </a:pPr>
             <a:r>
               <a:rPr lang="en-US" sz="1050" u="sng" dirty="0">
                 <a:solidFill>
